--- a/documents/Analiza konkurencji – spacery AI.pptx
+++ b/documents/Analiza konkurencji – spacery AI.pptx
@@ -1660,6 +1660,18 @@
   <p:clrMapOvr>
     <a:masterClrMapping/>
   </p:clrMapOvr>
+  <mc:AlternateContent xmlns:mc="http://schemas.openxmlformats.org/markup-compatibility/2006">
+    <mc:Choice xmlns:p15="http://schemas.microsoft.com/office/powerpoint/2012/main" Requires="p15">
+      <p:transition xmlns:p14="http://schemas.microsoft.com/office/powerpoint/2010/main" spd="slow" p14:dur="2000">
+        <p15:prstTrans prst="prestige"/>
+      </p:transition>
+    </mc:Choice>
+    <mc:Fallback>
+      <p:transition spd="slow">
+        <p:fade/>
+      </p:transition>
+    </mc:Fallback>
+  </mc:AlternateContent>
 </p:sld>
 </file>
 
@@ -2283,6 +2295,18 @@
   <p:clrMapOvr>
     <a:masterClrMapping/>
   </p:clrMapOvr>
+  <mc:AlternateContent xmlns:mc="http://schemas.openxmlformats.org/markup-compatibility/2006">
+    <mc:Choice xmlns:p14="http://schemas.microsoft.com/office/powerpoint/2010/main" Requires="p14">
+      <p:transition spd="slow" p14:dur="1600">
+        <p14:prism isContent="1" isInverted="1"/>
+      </p:transition>
+    </mc:Choice>
+    <mc:Fallback>
+      <p:transition spd="slow">
+        <p:fade/>
+      </p:transition>
+    </mc:Fallback>
+  </mc:AlternateContent>
 </p:sld>
 </file>
 
@@ -2375,7 +2399,7 @@
         </p:nvGraphicFramePr>
         <p:xfrm>
           <a:off x="823350" y="2557859"/>
-          <a:ext cx="10555883" cy="3284141"/>
+          <a:ext cx="10555883" cy="3284144"/>
         </p:xfrm>
         <a:graphic>
           <a:graphicData uri="http://schemas.openxmlformats.org/drawingml/2006/table">
@@ -4110,6 +4134,18 @@
   <p:clrMapOvr>
     <a:masterClrMapping/>
   </p:clrMapOvr>
+  <mc:AlternateContent xmlns:mc="http://schemas.openxmlformats.org/markup-compatibility/2006">
+    <mc:Choice xmlns:p14="http://schemas.microsoft.com/office/powerpoint/2010/main" Requires="p14">
+      <p:transition spd="slow" p14:dur="1600">
+        <p14:prism isContent="1" isInverted="1"/>
+      </p:transition>
+    </mc:Choice>
+    <mc:Fallback>
+      <p:transition spd="slow">
+        <p:fade/>
+      </p:transition>
+    </mc:Fallback>
+  </mc:AlternateContent>
 </p:sld>
 </file>
 
@@ -4923,6 +4959,18 @@
   <p:clrMapOvr>
     <a:masterClrMapping/>
   </p:clrMapOvr>
+  <mc:AlternateContent xmlns:mc="http://schemas.openxmlformats.org/markup-compatibility/2006">
+    <mc:Choice xmlns:p14="http://schemas.microsoft.com/office/powerpoint/2010/main" Requires="p14">
+      <p:transition spd="slow" p14:dur="1600">
+        <p14:prism isContent="1" isInverted="1"/>
+      </p:transition>
+    </mc:Choice>
+    <mc:Fallback>
+      <p:transition spd="slow">
+        <p:fade/>
+      </p:transition>
+    </mc:Fallback>
+  </mc:AlternateContent>
 </p:sld>
 </file>
 
@@ -5092,6 +5140,18 @@
   <p:clrMapOvr>
     <a:masterClrMapping/>
   </p:clrMapOvr>
+  <mc:AlternateContent xmlns:mc="http://schemas.openxmlformats.org/markup-compatibility/2006">
+    <mc:Choice xmlns:p14="http://schemas.microsoft.com/office/powerpoint/2010/main" Requires="p14">
+      <p:transition spd="slow" p14:dur="1600">
+        <p14:prism isContent="1" isInverted="1"/>
+      </p:transition>
+    </mc:Choice>
+    <mc:Fallback>
+      <p:transition spd="slow">
+        <p:fade/>
+      </p:transition>
+    </mc:Fallback>
+  </mc:AlternateContent>
 </p:sld>
 </file>
 
@@ -5184,7 +5244,7 @@
         </p:nvGraphicFramePr>
         <p:xfrm>
           <a:off x="823350" y="3378892"/>
-          <a:ext cx="10555883" cy="2463105"/>
+          <a:ext cx="10555883" cy="2463108"/>
         </p:xfrm>
         <a:graphic>
           <a:graphicData uri="http://schemas.openxmlformats.org/drawingml/2006/table">
@@ -6497,6 +6557,18 @@
   <p:clrMapOvr>
     <a:masterClrMapping/>
   </p:clrMapOvr>
+  <mc:AlternateContent xmlns:mc="http://schemas.openxmlformats.org/markup-compatibility/2006">
+    <mc:Choice xmlns:p14="http://schemas.microsoft.com/office/powerpoint/2010/main" Requires="p14">
+      <p:transition spd="slow" p14:dur="1600">
+        <p14:prism isContent="1" isInverted="1"/>
+      </p:transition>
+    </mc:Choice>
+    <mc:Fallback>
+      <p:transition spd="slow">
+        <p:fade/>
+      </p:transition>
+    </mc:Fallback>
+  </mc:AlternateContent>
 </p:sld>
 </file>
 
@@ -7046,6 +7118,18 @@
   <p:clrMapOvr>
     <a:masterClrMapping/>
   </p:clrMapOvr>
+  <mc:AlternateContent xmlns:mc="http://schemas.openxmlformats.org/markup-compatibility/2006">
+    <mc:Choice xmlns:p14="http://schemas.microsoft.com/office/powerpoint/2010/main" Requires="p14">
+      <p:transition spd="slow" p14:dur="1600">
+        <p14:prism isContent="1" isInverted="1"/>
+      </p:transition>
+    </mc:Choice>
+    <mc:Fallback>
+      <p:transition spd="slow">
+        <p:fade/>
+      </p:transition>
+    </mc:Fallback>
+  </mc:AlternateContent>
 </p:sld>
 </file>
 
